--- a/relatorios/maximize/pptx/eqtl-servicos-setembro-2026.pptx
+++ b/relatorios/maximize/pptx/eqtl-servicos-setembro-2026.pptx
@@ -7844,7 +7844,77 @@
         <p:spPr>
           <a:xfrm>
             <a:off x="771525" y="1828800"/>
-            <a:ext cx="10968418" cy="1009650"/>
+            <a:ext cx="1362968" cy="142875"/>
+          </a:xfrm>
+          <a:prstGeom prst="rect">
+            <a:avLst/>
+          </a:prstGeom>
+          <a:noFill/>
+        </p:spPr>
+        <p:txBody>
+          <a:bodyPr wrap="none" lIns="0" rIns="0" tIns="0" bIns="0" anchor="t">
+            <a:noAutofit/>
+          </a:bodyPr>
+          <a:lstStyle/>
+          <a:p>
+            <a:pPr algn="l"/>
+            <a:r>
+              <a:rPr sz="950" b="1" i="0">
+                <a:solidFill>
+                  <a:srgbClr val="000000"/>
+                </a:solidFill>
+                <a:latin typeface="Montserrat"/>
+              </a:rPr>
+              <a:t>Alcance e Interações:</a:t>
+            </a:r>
+          </a:p>
+        </p:txBody>
+      </p:sp>
+      <p:sp>
+        <p:nvSpPr>
+          <p:cNvPr id="9" name="TextBox 8"/>
+          <p:cNvSpPr txBox="1"/>
+          <p:nvPr/>
+        </p:nvSpPr>
+        <p:spPr>
+          <a:xfrm>
+            <a:off x="771525" y="2695575"/>
+            <a:ext cx="1786533" cy="142875"/>
+          </a:xfrm>
+          <a:prstGeom prst="rect">
+            <a:avLst/>
+          </a:prstGeom>
+          <a:noFill/>
+        </p:spPr>
+        <p:txBody>
+          <a:bodyPr wrap="none" lIns="0" rIns="0" tIns="0" bIns="0" anchor="t">
+            <a:noAutofit/>
+          </a:bodyPr>
+          <a:lstStyle/>
+          <a:p>
+            <a:pPr algn="l"/>
+            <a:r>
+              <a:rPr sz="950" b="1" i="0">
+                <a:solidFill>
+                  <a:srgbClr val="000000"/>
+                </a:solidFill>
+                <a:latin typeface="Montserrat"/>
+              </a:rPr>
+              <a:t>Crescimento de Seguidores:</a:t>
+            </a:r>
+          </a:p>
+        </p:txBody>
+      </p:sp>
+      <p:sp>
+        <p:nvSpPr>
+          <p:cNvPr id="10" name="TextBox 9"/>
+          <p:cNvSpPr txBox="1"/>
+          <p:nvPr/>
+        </p:nvSpPr>
+        <p:spPr>
+          <a:xfrm>
+            <a:off x="942975" y="2007394"/>
+            <a:ext cx="10791825" cy="321469"/>
           </a:xfrm>
           <a:prstGeom prst="rect">
             <a:avLst/>
@@ -7863,13 +7933,31 @@
               </a:lnSpc>
             </a:pPr>
             <a:r>
+              <a:rPr sz="950" b="0" i="0">
+                <a:solidFill>
+                  <a:srgbClr val="000000"/>
+                </a:solidFill>
+                <a:latin typeface="Montserrat"/>
+              </a:rPr>
+              <a:t>• </a:t>
+            </a:r>
+            <a:r>
               <a:rPr sz="950" b="1" i="0">
                 <a:solidFill>
                   <a:srgbClr val="000000"/>
                 </a:solidFill>
                 <a:latin typeface="Montserrat"/>
               </a:rPr>
-              <a:t>Alcance e Interações:</a:t>
+              <a:t>Instagram:</a:t>
+            </a:r>
+            <a:r>
+              <a:rPr sz="950" b="0" i="0">
+                <a:solidFill>
+                  <a:srgbClr val="000000"/>
+                </a:solidFill>
+                <a:latin typeface="Montserrat"/>
+              </a:rPr>
+              <a:t> -2% no alcance e -73% nas interações, após o pico de agosto gerado pela collab de Dia dos Pais; visitas ao perfil +13% e cliques no link somando 7.328. A collab de Dia do Cliente voltou a liderar as interações. O mês teve muitos comentários, porém </a:t>
             </a:r>
             <a:r>
               <a:rPr sz="950" b="1" i="0">
@@ -7878,38 +7966,8 @@
                 </a:solidFill>
                 <a:latin typeface="Montserrat"/>
               </a:rPr>
-              <a:t>Crescimento de Seguidores:</a:t>
-            </a:r>
-          </a:p>
-        </p:txBody>
-      </p:sp>
-      <p:sp>
-        <p:nvSpPr>
-          <p:cNvPr id="9" name="TextBox 8"/>
-          <p:cNvSpPr txBox="1"/>
-          <p:nvPr/>
-        </p:nvSpPr>
-        <p:spPr>
-          <a:xfrm>
-            <a:off x="942975" y="2007394"/>
-            <a:ext cx="10791825" cy="321469"/>
-          </a:xfrm>
-          <a:prstGeom prst="rect">
-            <a:avLst/>
-          </a:prstGeom>
-          <a:noFill/>
-        </p:spPr>
-        <p:txBody>
-          <a:bodyPr wrap="square" lIns="0" rIns="0" tIns="0" bIns="0" anchor="t">
-            <a:noAutofit/>
-          </a:bodyPr>
-          <a:lstStyle/>
-          <a:p>
-            <a:pPr algn="l">
-              <a:lnSpc>
-                <a:spcPts val="1406"/>
-              </a:lnSpc>
-            </a:pPr>
+              <a:t>em grande parte negativos</a:t>
+            </a:r>
             <a:r>
               <a:rPr sz="950" b="0" i="0">
                 <a:solidFill>
@@ -7917,42 +7975,6 @@
                 </a:solidFill>
                 <a:latin typeface="Montserrat"/>
               </a:rPr>
-              <a:t>• </a:t>
-            </a:r>
-            <a:r>
-              <a:rPr sz="950" b="1" i="0">
-                <a:solidFill>
-                  <a:srgbClr val="000000"/>
-                </a:solidFill>
-                <a:latin typeface="Montserrat"/>
-              </a:rPr>
-              <a:t>Instagram:</a:t>
-            </a:r>
-            <a:r>
-              <a:rPr sz="950" b="0" i="0">
-                <a:solidFill>
-                  <a:srgbClr val="000000"/>
-                </a:solidFill>
-                <a:latin typeface="Montserrat"/>
-              </a:rPr>
-              <a:t> -2% no alcance e -73% nas interações, após o pico de agosto gerado pela collab de Dia dos Pais; visitas ao perfil +13% e cliques no link somando 7.328. A collab de Dia do Cliente voltou a liderar as interações. O mês teve muitos comentários, porém </a:t>
-            </a:r>
-            <a:r>
-              <a:rPr sz="950" b="1" i="0">
-                <a:solidFill>
-                  <a:srgbClr val="000000"/>
-                </a:solidFill>
-                <a:latin typeface="Montserrat"/>
-              </a:rPr>
-              <a:t>em grande parte negativos</a:t>
-            </a:r>
-            <a:r>
-              <a:rPr sz="950" b="0" i="0">
-                <a:solidFill>
-                  <a:srgbClr val="000000"/>
-                </a:solidFill>
-                <a:latin typeface="Montserrat"/>
-              </a:rPr>
               <a:t>, com reclamações de apagões na região de Canaã;</a:t>
             </a:r>
           </a:p>
@@ -7960,7 +7982,7 @@
       </p:sp>
       <p:sp>
         <p:nvSpPr>
-          <p:cNvPr id="10" name="TextBox 9"/>
+          <p:cNvPr id="11" name="TextBox 10"/>
           <p:cNvSpPr txBox="1"/>
           <p:nvPr/>
         </p:nvSpPr>
@@ -8013,7 +8035,7 @@
       </p:sp>
       <p:sp>
         <p:nvSpPr>
-          <p:cNvPr id="11" name="TextBox 10"/>
+          <p:cNvPr id="12" name="TextBox 11"/>
           <p:cNvSpPr txBox="1"/>
           <p:nvPr/>
         </p:nvSpPr>
@@ -8066,7 +8088,7 @@
       </p:sp>
       <p:sp>
         <p:nvSpPr>
-          <p:cNvPr id="12" name="TextBox 11"/>
+          <p:cNvPr id="13" name="TextBox 12"/>
           <p:cNvSpPr txBox="1"/>
           <p:nvPr/>
         </p:nvSpPr>
@@ -8119,7 +8141,7 @@
       </p:sp>
       <p:sp>
         <p:nvSpPr>
-          <p:cNvPr id="13" name="TextBox 12"/>
+          <p:cNvPr id="14" name="TextBox 13"/>
           <p:cNvSpPr txBox="1"/>
           <p:nvPr/>
         </p:nvSpPr>
@@ -8154,7 +8176,7 @@
       </p:sp>
       <p:sp>
         <p:nvSpPr>
-          <p:cNvPr id="14" name="TextBox 13"/>
+          <p:cNvPr id="15" name="TextBox 14"/>
           <p:cNvSpPr txBox="1"/>
           <p:nvPr/>
         </p:nvSpPr>
@@ -8198,7 +8220,7 @@
       </p:sp>
       <p:sp>
         <p:nvSpPr>
-          <p:cNvPr id="15" name="TextBox 14"/>
+          <p:cNvPr id="16" name="TextBox 15"/>
           <p:cNvSpPr txBox="1"/>
           <p:nvPr/>
         </p:nvSpPr>
@@ -8242,7 +8264,7 @@
       </p:sp>
       <p:sp>
         <p:nvSpPr>
-          <p:cNvPr id="16" name="TextBox 15"/>
+          <p:cNvPr id="17" name="TextBox 16"/>
           <p:cNvSpPr txBox="1"/>
           <p:nvPr/>
         </p:nvSpPr>
@@ -8286,7 +8308,7 @@
       </p:sp>
       <p:sp>
         <p:nvSpPr>
-          <p:cNvPr id="17" name="TextBox 16"/>
+          <p:cNvPr id="18" name="TextBox 17"/>
           <p:cNvSpPr txBox="1"/>
           <p:nvPr/>
         </p:nvSpPr>
@@ -8330,7 +8352,7 @@
       </p:sp>
       <p:sp>
         <p:nvSpPr>
-          <p:cNvPr id="18" name="TextBox 17"/>
+          <p:cNvPr id="19" name="TextBox 18"/>
           <p:cNvSpPr txBox="1"/>
           <p:nvPr/>
         </p:nvSpPr>
